--- a/src/day22-26/credit.pptx
+++ b/src/day22-26/credit.pptx
@@ -5,7 +5,7 @@
     <p:sldMasterId id="2147483648" r:id="rId1"/>
   </p:sldMasterIdLst>
   <p:notesMasterIdLst>
-    <p:notesMasterId r:id="rId13"/>
+    <p:notesMasterId r:id="rId12"/>
   </p:notesMasterIdLst>
   <p:sldIdLst>
     <p:sldId id="256" r:id="rId2"/>
@@ -14,11 +14,10 @@
     <p:sldId id="257" r:id="rId5"/>
     <p:sldId id="261" r:id="rId6"/>
     <p:sldId id="264" r:id="rId7"/>
-    <p:sldId id="259" r:id="rId8"/>
-    <p:sldId id="267" r:id="rId9"/>
-    <p:sldId id="262" r:id="rId10"/>
-    <p:sldId id="268" r:id="rId11"/>
-    <p:sldId id="269" r:id="rId12"/>
+    <p:sldId id="267" r:id="rId8"/>
+    <p:sldId id="262" r:id="rId9"/>
+    <p:sldId id="268" r:id="rId10"/>
+    <p:sldId id="269" r:id="rId11"/>
   </p:sldIdLst>
   <p:sldSz cx="12192000" cy="6858000"/>
   <p:notesSz cx="6858000" cy="9144000"/>
@@ -218,7 +217,7 @@
           <a:p>
             <a:fld id="{1AFAF471-601B-4CC2-A64E-4EA05E456D16}" type="datetimeFigureOut">
               <a:rPr lang="en-IN" smtClean="0"/>
-              <a:t>10-03-2026</a:t>
+              <a:t>11-03-2026</a:t>
             </a:fld>
             <a:endParaRPr lang="en-IN"/>
           </a:p>
@@ -771,7 +770,7 @@
             <a:fld id="{B61BEF0D-F0BB-DE4B-95CE-6DB70DBA9567}" type="datetimeFigureOut">
               <a:rPr lang="en-US" dirty="0"/>
               <a:pPr/>
-              <a:t>3/10/2026</a:t>
+              <a:t>3/11/2026</a:t>
             </a:fld>
             <a:endParaRPr lang="en-US" dirty="0"/>
           </a:p>
@@ -1106,7 +1105,7 @@
             <a:fld id="{B61BEF0D-F0BB-DE4B-95CE-6DB70DBA9567}" type="datetimeFigureOut">
               <a:rPr lang="en-US" dirty="0"/>
               <a:pPr/>
-              <a:t>3/10/2026</a:t>
+              <a:t>3/11/2026</a:t>
             </a:fld>
             <a:endParaRPr lang="en-US" dirty="0"/>
           </a:p>
@@ -1504,7 +1503,7 @@
             <a:fld id="{B61BEF0D-F0BB-DE4B-95CE-6DB70DBA9567}" type="datetimeFigureOut">
               <a:rPr lang="en-US" dirty="0"/>
               <a:pPr/>
-              <a:t>3/10/2026</a:t>
+              <a:t>3/11/2026</a:t>
             </a:fld>
             <a:endParaRPr lang="en-US" dirty="0"/>
           </a:p>
@@ -1837,7 +1836,7 @@
             <a:fld id="{B61BEF0D-F0BB-DE4B-95CE-6DB70DBA9567}" type="datetimeFigureOut">
               <a:rPr lang="en-US" dirty="0"/>
               <a:pPr/>
-              <a:t>3/10/2026</a:t>
+              <a:t>3/11/2026</a:t>
             </a:fld>
             <a:endParaRPr lang="en-US" dirty="0"/>
           </a:p>
@@ -2154,7 +2153,7 @@
             <a:fld id="{B61BEF0D-F0BB-DE4B-95CE-6DB70DBA9567}" type="datetimeFigureOut">
               <a:rPr lang="en-US" dirty="0"/>
               <a:pPr/>
-              <a:t>3/10/2026</a:t>
+              <a:t>3/11/2026</a:t>
             </a:fld>
             <a:endParaRPr lang="en-US" dirty="0"/>
           </a:p>
@@ -2547,7 +2546,7 @@
             <a:fld id="{B61BEF0D-F0BB-DE4B-95CE-6DB70DBA9567}" type="datetimeFigureOut">
               <a:rPr lang="en-US" dirty="0"/>
               <a:pPr/>
-              <a:t>3/10/2026</a:t>
+              <a:t>3/11/2026</a:t>
             </a:fld>
             <a:endParaRPr lang="en-US" dirty="0"/>
           </a:p>
@@ -2801,7 +2800,7 @@
             <a:fld id="{B61BEF0D-F0BB-DE4B-95CE-6DB70DBA9567}" type="datetimeFigureOut">
               <a:rPr lang="en-US" dirty="0"/>
               <a:pPr/>
-              <a:t>3/10/2026</a:t>
+              <a:t>3/11/2026</a:t>
             </a:fld>
             <a:endParaRPr lang="en-US" dirty="0"/>
           </a:p>
@@ -3060,7 +3059,7 @@
             <a:fld id="{B61BEF0D-F0BB-DE4B-95CE-6DB70DBA9567}" type="datetimeFigureOut">
               <a:rPr lang="en-US" dirty="0"/>
               <a:pPr/>
-              <a:t>3/10/2026</a:t>
+              <a:t>3/11/2026</a:t>
             </a:fld>
             <a:endParaRPr lang="en-US" dirty="0"/>
           </a:p>
@@ -3319,7 +3318,7 @@
             <a:fld id="{B61BEF0D-F0BB-DE4B-95CE-6DB70DBA9567}" type="datetimeFigureOut">
               <a:rPr lang="en-US" dirty="0"/>
               <a:pPr/>
-              <a:t>3/10/2026</a:t>
+              <a:t>3/11/2026</a:t>
             </a:fld>
             <a:endParaRPr lang="en-US" dirty="0"/>
           </a:p>
@@ -3645,7 +3644,7 @@
             <a:fld id="{B61BEF0D-F0BB-DE4B-95CE-6DB70DBA9567}" type="datetimeFigureOut">
               <a:rPr lang="en-US" dirty="0"/>
               <a:pPr/>
-              <a:t>3/10/2026</a:t>
+              <a:t>3/11/2026</a:t>
             </a:fld>
             <a:endParaRPr lang="en-US" dirty="0"/>
           </a:p>
@@ -3965,7 +3964,7 @@
             <a:fld id="{B61BEF0D-F0BB-DE4B-95CE-6DB70DBA9567}" type="datetimeFigureOut">
               <a:rPr lang="en-US" dirty="0"/>
               <a:pPr/>
-              <a:t>3/10/2026</a:t>
+              <a:t>3/11/2026</a:t>
             </a:fld>
             <a:endParaRPr lang="en-US" dirty="0"/>
           </a:p>
@@ -4419,7 +4418,7 @@
             <a:fld id="{B61BEF0D-F0BB-DE4B-95CE-6DB70DBA9567}" type="datetimeFigureOut">
               <a:rPr lang="en-US" dirty="0"/>
               <a:pPr/>
-              <a:t>3/10/2026</a:t>
+              <a:t>3/11/2026</a:t>
             </a:fld>
             <a:endParaRPr lang="en-US" dirty="0"/>
           </a:p>
@@ -4621,7 +4620,7 @@
             <a:fld id="{B61BEF0D-F0BB-DE4B-95CE-6DB70DBA9567}" type="datetimeFigureOut">
               <a:rPr lang="en-US" dirty="0"/>
               <a:pPr/>
-              <a:t>3/10/2026</a:t>
+              <a:t>3/11/2026</a:t>
             </a:fld>
             <a:endParaRPr lang="en-US" dirty="0"/>
           </a:p>
@@ -4795,7 +4794,7 @@
             <a:fld id="{B61BEF0D-F0BB-DE4B-95CE-6DB70DBA9567}" type="datetimeFigureOut">
               <a:rPr lang="en-US" dirty="0"/>
               <a:pPr/>
-              <a:t>3/10/2026</a:t>
+              <a:t>3/11/2026</a:t>
             </a:fld>
             <a:endParaRPr lang="en-US" dirty="0"/>
           </a:p>
@@ -5125,7 +5124,7 @@
             <a:fld id="{B61BEF0D-F0BB-DE4B-95CE-6DB70DBA9567}" type="datetimeFigureOut">
               <a:rPr lang="en-US" dirty="0"/>
               <a:pPr/>
-              <a:t>3/10/2026</a:t>
+              <a:t>3/11/2026</a:t>
             </a:fld>
             <a:endParaRPr lang="en-US" dirty="0"/>
           </a:p>
@@ -5467,7 +5466,7 @@
             <a:fld id="{B61BEF0D-F0BB-DE4B-95CE-6DB70DBA9567}" type="datetimeFigureOut">
               <a:rPr lang="en-US" dirty="0"/>
               <a:pPr/>
-              <a:t>3/10/2026</a:t>
+              <a:t>3/11/2026</a:t>
             </a:fld>
             <a:endParaRPr lang="en-US" dirty="0"/>
           </a:p>
@@ -7591,7 +7590,7 @@
             <a:fld id="{B61BEF0D-F0BB-DE4B-95CE-6DB70DBA9567}" type="datetimeFigureOut">
               <a:rPr lang="en-US" dirty="0"/>
               <a:pPr/>
-              <a:t>3/10/2026</a:t>
+              <a:t>3/11/2026</a:t>
             </a:fld>
             <a:endParaRPr lang="en-US" dirty="0"/>
           </a:p>
@@ -8458,335 +8457,17 @@
   <p:clrMapOvr>
     <a:masterClrMapping/>
   </p:clrMapOvr>
+  <p:timing>
+    <p:tnLst>
+      <p:par>
+        <p:cTn id="1" dur="indefinite" restart="never" nodeType="tmRoot"/>
+      </p:par>
+    </p:tnLst>
+  </p:timing>
 </p:sld>
 </file>
 
 <file path=ppt/slides/slide10.xml><?xml version="1.0" encoding="utf-8"?>
-<p:sld xmlns:a="http://schemas.openxmlformats.org/drawingml/2006/main" xmlns:r="http://schemas.openxmlformats.org/officeDocument/2006/relationships" xmlns:p="http://schemas.openxmlformats.org/presentationml/2006/main">
-  <p:cSld>
-    <p:spTree>
-      <p:nvGrpSpPr>
-        <p:cNvPr id="1" name=""/>
-        <p:cNvGrpSpPr/>
-        <p:nvPr/>
-      </p:nvGrpSpPr>
-      <p:grpSpPr>
-        <a:xfrm>
-          <a:off x="0" y="0"/>
-          <a:ext cx="0" cy="0"/>
-          <a:chOff x="0" y="0"/>
-          <a:chExt cx="0" cy="0"/>
-        </a:xfrm>
-      </p:grpSpPr>
-      <p:sp>
-        <p:nvSpPr>
-          <p:cNvPr id="2" name="Title 1"/>
-          <p:cNvSpPr>
-            <a:spLocks noGrp="1"/>
-          </p:cNvSpPr>
-          <p:nvPr>
-            <p:ph type="title"/>
-          </p:nvPr>
-        </p:nvSpPr>
-        <p:spPr>
-          <a:xfrm>
-            <a:off x="5190871" y="275767"/>
-            <a:ext cx="3712081" cy="943433"/>
-          </a:xfrm>
-        </p:spPr>
-        <p:txBody>
-          <a:bodyPr>
-            <a:normAutofit/>
-          </a:bodyPr>
-          <a:lstStyle/>
-          <a:p>
-            <a:r>
-              <a:rPr lang="en-US" sz="5400" b="1" dirty="0" smtClean="0">
-                <a:solidFill>
-                  <a:srgbClr val="00B0F0"/>
-                </a:solidFill>
-                <a:latin typeface="Times New Roman" panose="02020603050405020304" pitchFamily="18" charset="0"/>
-                <a:cs typeface="Times New Roman" panose="02020603050405020304" pitchFamily="18" charset="0"/>
-              </a:rPr>
-              <a:t>References</a:t>
-            </a:r>
-            <a:endParaRPr lang="en-IN" sz="5400" b="1" dirty="0">
-              <a:solidFill>
-                <a:srgbClr val="00B0F0"/>
-              </a:solidFill>
-              <a:latin typeface="Times New Roman" panose="02020603050405020304" pitchFamily="18" charset="0"/>
-              <a:cs typeface="Times New Roman" panose="02020603050405020304" pitchFamily="18" charset="0"/>
-            </a:endParaRPr>
-          </a:p>
-        </p:txBody>
-      </p:sp>
-      <p:sp>
-        <p:nvSpPr>
-          <p:cNvPr id="3" name="Content Placeholder 2"/>
-          <p:cNvSpPr>
-            <a:spLocks noGrp="1"/>
-          </p:cNvSpPr>
-          <p:nvPr>
-            <p:ph idx="1"/>
-          </p:nvPr>
-        </p:nvSpPr>
-        <p:spPr>
-          <a:xfrm>
-            <a:off x="1459659" y="1461246"/>
-            <a:ext cx="10149635" cy="4697506"/>
-          </a:xfrm>
-        </p:spPr>
-        <p:txBody>
-          <a:bodyPr>
-            <a:noAutofit/>
-          </a:bodyPr>
-          <a:lstStyle/>
-          <a:p>
-            <a:pPr algn="just"/>
-            <a:r>
-              <a:rPr lang="en-US" altLang="en-US" sz="2400" dirty="0" smtClean="0">
-                <a:solidFill>
-                  <a:schemeClr val="tx1"/>
-                </a:solidFill>
-                <a:latin typeface="Times New Roman" panose="02020603050405020304" pitchFamily="18" charset="0"/>
-                <a:cs typeface="Times New Roman" panose="02020603050405020304" pitchFamily="18" charset="0"/>
-              </a:rPr>
-              <a:t>Sun</a:t>
-            </a:r>
-            <a:r>
-              <a:rPr lang="en-US" altLang="en-US" sz="2400" dirty="0">
-                <a:solidFill>
-                  <a:schemeClr val="tx1"/>
-                </a:solidFill>
-                <a:latin typeface="Times New Roman" panose="02020603050405020304" pitchFamily="18" charset="0"/>
-                <a:cs typeface="Times New Roman" panose="02020603050405020304" pitchFamily="18" charset="0"/>
-              </a:rPr>
-              <a:t>, Y., et al., “Alternative Data in Finance and Business: Emerging Applications and Theory Analysis.” </a:t>
-            </a:r>
-            <a:r>
-              <a:rPr lang="en-US" altLang="en-US" sz="2400" dirty="0" smtClean="0">
-                <a:solidFill>
-                  <a:schemeClr val="tx1"/>
-                </a:solidFill>
-                <a:latin typeface="Times New Roman" panose="02020603050405020304" pitchFamily="18" charset="0"/>
-                <a:cs typeface="Times New Roman" panose="02020603050405020304" pitchFamily="18" charset="0"/>
-              </a:rPr>
-              <a:t>2024.</a:t>
-            </a:r>
-          </a:p>
-          <a:p>
-            <a:pPr algn="just"/>
-            <a:r>
-              <a:rPr lang="en-US" altLang="en-US" sz="2400" dirty="0" err="1" smtClean="0">
-                <a:solidFill>
-                  <a:schemeClr val="tx1"/>
-                </a:solidFill>
-                <a:latin typeface="Times New Roman" panose="02020603050405020304" pitchFamily="18" charset="0"/>
-                <a:cs typeface="Times New Roman" panose="02020603050405020304" pitchFamily="18" charset="0"/>
-              </a:rPr>
-              <a:t>Miljkovic</a:t>
-            </a:r>
-            <a:r>
-              <a:rPr lang="en-US" altLang="en-US" sz="2400" dirty="0">
-                <a:solidFill>
-                  <a:schemeClr val="tx1"/>
-                </a:solidFill>
-                <a:latin typeface="Times New Roman" panose="02020603050405020304" pitchFamily="18" charset="0"/>
-                <a:cs typeface="Times New Roman" panose="02020603050405020304" pitchFamily="18" charset="0"/>
-              </a:rPr>
-              <a:t>, T., &amp; Wang, P., “A Dimension Reduction Assisted Credit Scoring Method for Big Data with Categorical Features.” </a:t>
-            </a:r>
-            <a:r>
-              <a:rPr lang="en-US" altLang="en-US" sz="2400" dirty="0" smtClean="0">
-                <a:solidFill>
-                  <a:schemeClr val="tx1"/>
-                </a:solidFill>
-                <a:latin typeface="Times New Roman" panose="02020603050405020304" pitchFamily="18" charset="0"/>
-                <a:cs typeface="Times New Roman" panose="02020603050405020304" pitchFamily="18" charset="0"/>
-              </a:rPr>
-              <a:t>2025.</a:t>
-            </a:r>
-          </a:p>
-          <a:p>
-            <a:pPr algn="just"/>
-            <a:r>
-              <a:rPr lang="en-US" altLang="en-US" sz="2400" dirty="0" smtClean="0">
-                <a:solidFill>
-                  <a:schemeClr val="tx1"/>
-                </a:solidFill>
-                <a:latin typeface="Times New Roman" panose="02020603050405020304" pitchFamily="18" charset="0"/>
-                <a:cs typeface="Times New Roman" panose="02020603050405020304" pitchFamily="18" charset="0"/>
-              </a:rPr>
-              <a:t>La </a:t>
-            </a:r>
-            <a:r>
-              <a:rPr lang="en-US" altLang="en-US" sz="2400" dirty="0" err="1">
-                <a:solidFill>
-                  <a:schemeClr val="tx1"/>
-                </a:solidFill>
-                <a:latin typeface="Times New Roman" panose="02020603050405020304" pitchFamily="18" charset="0"/>
-                <a:cs typeface="Times New Roman" panose="02020603050405020304" pitchFamily="18" charset="0"/>
-              </a:rPr>
-              <a:t>Gatta</a:t>
-            </a:r>
-            <a:r>
-              <a:rPr lang="en-US" altLang="en-US" sz="2400" dirty="0">
-                <a:solidFill>
-                  <a:schemeClr val="tx1"/>
-                </a:solidFill>
-                <a:latin typeface="Times New Roman" panose="02020603050405020304" pitchFamily="18" charset="0"/>
-                <a:cs typeface="Times New Roman" panose="02020603050405020304" pitchFamily="18" charset="0"/>
-              </a:rPr>
-              <a:t>, V., et al., “A Novel Augmentation Strategy for Credit Scoring Modeling.” </a:t>
-            </a:r>
-            <a:r>
-              <a:rPr lang="en-US" altLang="en-US" sz="2400" dirty="0" smtClean="0">
-                <a:solidFill>
-                  <a:schemeClr val="tx1"/>
-                </a:solidFill>
-                <a:latin typeface="Times New Roman" panose="02020603050405020304" pitchFamily="18" charset="0"/>
-                <a:cs typeface="Times New Roman" panose="02020603050405020304" pitchFamily="18" charset="0"/>
-              </a:rPr>
-              <a:t>2025.</a:t>
-            </a:r>
-          </a:p>
-          <a:p>
-            <a:pPr algn="just"/>
-            <a:r>
-              <a:rPr lang="en-US" altLang="en-US" sz="2400" dirty="0" err="1" smtClean="0">
-                <a:solidFill>
-                  <a:schemeClr val="tx1"/>
-                </a:solidFill>
-                <a:latin typeface="Times New Roman" panose="02020603050405020304" pitchFamily="18" charset="0"/>
-                <a:cs typeface="Times New Roman" panose="02020603050405020304" pitchFamily="18" charset="0"/>
-              </a:rPr>
-              <a:t>Vakrani</a:t>
-            </a:r>
-            <a:r>
-              <a:rPr lang="en-US" altLang="en-US" sz="2400" dirty="0">
-                <a:solidFill>
-                  <a:schemeClr val="tx1"/>
-                </a:solidFill>
-                <a:latin typeface="Times New Roman" panose="02020603050405020304" pitchFamily="18" charset="0"/>
-                <a:cs typeface="Times New Roman" panose="02020603050405020304" pitchFamily="18" charset="0"/>
-              </a:rPr>
-              <a:t>, D. S., et al., “Evaluating AI-Driven Credit Scoring Models versus Traditional Statistical Techniques.” </a:t>
-            </a:r>
-            <a:r>
-              <a:rPr lang="en-US" altLang="en-US" sz="2400" dirty="0" smtClean="0">
-                <a:solidFill>
-                  <a:schemeClr val="tx1"/>
-                </a:solidFill>
-                <a:latin typeface="Times New Roman" panose="02020603050405020304" pitchFamily="18" charset="0"/>
-                <a:cs typeface="Times New Roman" panose="02020603050405020304" pitchFamily="18" charset="0"/>
-              </a:rPr>
-              <a:t>2026.</a:t>
-            </a:r>
-          </a:p>
-          <a:p>
-            <a:pPr algn="just"/>
-            <a:r>
-              <a:rPr lang="en-US" altLang="en-US" sz="2400" dirty="0" err="1" smtClean="0">
-                <a:solidFill>
-                  <a:schemeClr val="tx1"/>
-                </a:solidFill>
-                <a:latin typeface="Times New Roman" panose="02020603050405020304" pitchFamily="18" charset="0"/>
-                <a:cs typeface="Times New Roman" panose="02020603050405020304" pitchFamily="18" charset="0"/>
-              </a:rPr>
-              <a:t>Ayari</a:t>
-            </a:r>
-            <a:r>
-              <a:rPr lang="en-US" altLang="en-US" sz="2400" dirty="0">
-                <a:solidFill>
-                  <a:schemeClr val="tx1"/>
-                </a:solidFill>
-                <a:latin typeface="Times New Roman" panose="02020603050405020304" pitchFamily="18" charset="0"/>
-                <a:cs typeface="Times New Roman" panose="02020603050405020304" pitchFamily="18" charset="0"/>
-              </a:rPr>
-              <a:t>, H., et al., “Machine Learning Powered Financial Credit Scoring: A Systematic Literature Review.” 2026</a:t>
-            </a:r>
-            <a:r>
-              <a:rPr lang="en-US" altLang="en-US" sz="2400" dirty="0" smtClean="0">
-                <a:solidFill>
-                  <a:schemeClr val="tx1"/>
-                </a:solidFill>
-                <a:latin typeface="Times New Roman" panose="02020603050405020304" pitchFamily="18" charset="0"/>
-                <a:cs typeface="Times New Roman" panose="02020603050405020304" pitchFamily="18" charset="0"/>
-              </a:rPr>
-              <a:t>.</a:t>
-            </a:r>
-            <a:endParaRPr lang="en-US" altLang="en-US" sz="2400" dirty="0">
-              <a:solidFill>
-                <a:schemeClr val="tx1"/>
-              </a:solidFill>
-              <a:latin typeface="Times New Roman" panose="02020603050405020304" pitchFamily="18" charset="0"/>
-              <a:cs typeface="Times New Roman" panose="02020603050405020304" pitchFamily="18" charset="0"/>
-            </a:endParaRPr>
-          </a:p>
-        </p:txBody>
-      </p:sp>
-      <p:pic>
-        <p:nvPicPr>
-          <p:cNvPr id="4" name="Picture 3"/>
-          <p:cNvPicPr>
-            <a:picLocks noChangeAspect="1"/>
-          </p:cNvPicPr>
-          <p:nvPr/>
-        </p:nvPicPr>
-        <p:blipFill>
-          <a:blip r:embed="rId2"/>
-          <a:stretch>
-            <a:fillRect/>
-          </a:stretch>
-        </p:blipFill>
-        <p:spPr>
-          <a:xfrm>
-            <a:off x="9518469" y="-62222"/>
-            <a:ext cx="2673531" cy="1782354"/>
-          </a:xfrm>
-          <a:prstGeom prst="rect">
-            <a:avLst/>
-          </a:prstGeom>
-        </p:spPr>
-      </p:pic>
-      <p:pic>
-        <p:nvPicPr>
-          <p:cNvPr id="5" name="Picture 4"/>
-          <p:cNvPicPr>
-            <a:picLocks noChangeAspect="1"/>
-          </p:cNvPicPr>
-          <p:nvPr/>
-        </p:nvPicPr>
-        <p:blipFill>
-          <a:blip r:embed="rId3"/>
-          <a:stretch>
-            <a:fillRect/>
-          </a:stretch>
-        </p:blipFill>
-        <p:spPr>
-          <a:xfrm>
-            <a:off x="533859" y="74036"/>
-            <a:ext cx="2044320" cy="1362880"/>
-          </a:xfrm>
-          <a:prstGeom prst="rect">
-            <a:avLst/>
-          </a:prstGeom>
-        </p:spPr>
-      </p:pic>
-    </p:spTree>
-    <p:extLst>
-      <p:ext uri="{BB962C8B-B14F-4D97-AF65-F5344CB8AC3E}">
-        <p14:creationId xmlns:p14="http://schemas.microsoft.com/office/powerpoint/2010/main" val="2288417470"/>
-      </p:ext>
-    </p:extLst>
-  </p:cSld>
-  <p:clrMapOvr>
-    <a:masterClrMapping/>
-  </p:clrMapOvr>
-</p:sld>
-</file>
-
-<file path=ppt/slides/slide11.xml><?xml version="1.0" encoding="utf-8"?>
 <p:sld xmlns:a="http://schemas.openxmlformats.org/drawingml/2006/main" xmlns:r="http://schemas.openxmlformats.org/officeDocument/2006/relationships" xmlns:p="http://schemas.openxmlformats.org/presentationml/2006/main">
   <p:cSld>
     <p:spTree>
@@ -8903,6 +8584,13 @@
   <p:clrMapOvr>
     <a:masterClrMapping/>
   </p:clrMapOvr>
+  <p:timing>
+    <p:tnLst>
+      <p:par>
+        <p:cTn id="1" dur="indefinite" restart="never" nodeType="tmRoot"/>
+      </p:par>
+    </p:tnLst>
+  </p:timing>
 </p:sld>
 </file>
 
@@ -9288,6 +8976,13 @@
   <p:clrMapOvr>
     <a:masterClrMapping/>
   </p:clrMapOvr>
+  <p:timing>
+    <p:tnLst>
+      <p:par>
+        <p:cTn id="1" dur="indefinite" restart="never" nodeType="tmRoot"/>
+      </p:par>
+    </p:tnLst>
+  </p:timing>
 </p:sld>
 </file>
 
@@ -9526,6 +9221,13 @@
   <p:clrMapOvr>
     <a:masterClrMapping/>
   </p:clrMapOvr>
+  <p:timing>
+    <p:tnLst>
+      <p:par>
+        <p:cTn id="1" dur="indefinite" restart="never" nodeType="tmRoot"/>
+      </p:par>
+    </p:tnLst>
+  </p:timing>
 </p:sld>
 </file>
 
@@ -9601,107 +9303,39 @@
         </p:nvSpPr>
         <p:spPr>
           <a:xfrm>
-            <a:off x="2084119" y="2133600"/>
-            <a:ext cx="9550531" cy="3777622"/>
+            <a:off x="1744484" y="2690949"/>
+            <a:ext cx="9724704" cy="1436914"/>
           </a:xfrm>
         </p:spPr>
         <p:txBody>
           <a:bodyPr>
-            <a:normAutofit lnSpcReduction="10000"/>
+            <a:normAutofit/>
           </a:bodyPr>
           <a:lstStyle/>
           <a:p>
-            <a:pPr algn="just"/>
+            <a:pPr marL="0" indent="0" algn="just">
+              <a:buNone/>
+            </a:pPr>
             <a:r>
               <a:rPr lang="en-US" sz="2400" dirty="0">
                 <a:latin typeface="Times New Roman" panose="02020603050405020304" pitchFamily="18" charset="0"/>
                 <a:cs typeface="Times New Roman" panose="02020603050405020304" pitchFamily="18" charset="0"/>
               </a:rPr>
-              <a:t>Traditional credit scoring systems mainly depend on limited financial data such as income and credit history</a:t>
+              <a:t>Traditional credit scoring systems rely mainly on limited financial history, making it difficult to accurately evaluate the </a:t>
             </a:r>
             <a:r>
               <a:rPr lang="en-US" sz="2400" dirty="0" smtClean="0">
                 <a:latin typeface="Times New Roman" panose="02020603050405020304" pitchFamily="18" charset="0"/>
                 <a:cs typeface="Times New Roman" panose="02020603050405020304" pitchFamily="18" charset="0"/>
               </a:rPr>
-              <a:t>.</a:t>
-            </a:r>
-            <a:endParaRPr lang="en-US" sz="2400" dirty="0">
-              <a:latin typeface="Times New Roman" panose="02020603050405020304" pitchFamily="18" charset="0"/>
-              <a:cs typeface="Times New Roman" panose="02020603050405020304" pitchFamily="18" charset="0"/>
-            </a:endParaRPr>
-          </a:p>
-          <a:p>
-            <a:pPr algn="just"/>
+              <a:t>credit worthiness </a:t>
+            </a:r>
             <a:r>
               <a:rPr lang="en-US" sz="2400" dirty="0">
                 <a:latin typeface="Times New Roman" panose="02020603050405020304" pitchFamily="18" charset="0"/>
                 <a:cs typeface="Times New Roman" panose="02020603050405020304" pitchFamily="18" charset="0"/>
               </a:rPr>
-              <a:t>These systems cannot effectively handle large and complex datasets</a:t>
-            </a:r>
-            <a:r>
-              <a:rPr lang="en-US" sz="2400" dirty="0" smtClean="0">
-                <a:latin typeface="Times New Roman" panose="02020603050405020304" pitchFamily="18" charset="0"/>
-                <a:cs typeface="Times New Roman" panose="02020603050405020304" pitchFamily="18" charset="0"/>
-              </a:rPr>
-              <a:t>.</a:t>
-            </a:r>
-            <a:endParaRPr lang="en-US" sz="2400" dirty="0">
-              <a:latin typeface="Times New Roman" panose="02020603050405020304" pitchFamily="18" charset="0"/>
-              <a:cs typeface="Times New Roman" panose="02020603050405020304" pitchFamily="18" charset="0"/>
-            </a:endParaRPr>
-          </a:p>
-          <a:p>
-            <a:pPr algn="just"/>
-            <a:r>
-              <a:rPr lang="en-US" sz="2400" dirty="0">
-                <a:latin typeface="Times New Roman" panose="02020603050405020304" pitchFamily="18" charset="0"/>
-                <a:cs typeface="Times New Roman" panose="02020603050405020304" pitchFamily="18" charset="0"/>
-              </a:rPr>
-              <a:t>Many individuals with little or no credit history are often rejected for loans</a:t>
-            </a:r>
-            <a:r>
-              <a:rPr lang="en-US" sz="2400" dirty="0" smtClean="0">
-                <a:latin typeface="Times New Roman" panose="02020603050405020304" pitchFamily="18" charset="0"/>
-                <a:cs typeface="Times New Roman" panose="02020603050405020304" pitchFamily="18" charset="0"/>
-              </a:rPr>
-              <a:t>.</a:t>
-            </a:r>
-            <a:endParaRPr lang="en-US" sz="2400" dirty="0">
-              <a:latin typeface="Times New Roman" panose="02020603050405020304" pitchFamily="18" charset="0"/>
-              <a:cs typeface="Times New Roman" panose="02020603050405020304" pitchFamily="18" charset="0"/>
-            </a:endParaRPr>
-          </a:p>
-          <a:p>
-            <a:pPr algn="just"/>
-            <a:r>
-              <a:rPr lang="en-US" sz="2400" dirty="0">
-                <a:latin typeface="Times New Roman" panose="02020603050405020304" pitchFamily="18" charset="0"/>
-                <a:cs typeface="Times New Roman" panose="02020603050405020304" pitchFamily="18" charset="0"/>
-              </a:rPr>
-              <a:t>This can lead to inaccurate credit risk assessment and poor lending decisions</a:t>
-            </a:r>
-            <a:r>
-              <a:rPr lang="en-US" sz="2400" dirty="0" smtClean="0">
-                <a:latin typeface="Times New Roman" panose="02020603050405020304" pitchFamily="18" charset="0"/>
-                <a:cs typeface="Times New Roman" panose="02020603050405020304" pitchFamily="18" charset="0"/>
-              </a:rPr>
-              <a:t>.</a:t>
-            </a:r>
-            <a:endParaRPr lang="en-US" sz="2400" dirty="0">
-              <a:latin typeface="Times New Roman" panose="02020603050405020304" pitchFamily="18" charset="0"/>
-              <a:cs typeface="Times New Roman" panose="02020603050405020304" pitchFamily="18" charset="0"/>
-            </a:endParaRPr>
-          </a:p>
-          <a:p>
-            <a:pPr algn="just"/>
-            <a:r>
-              <a:rPr lang="en-US" sz="2400" dirty="0">
-                <a:latin typeface="Times New Roman" panose="02020603050405020304" pitchFamily="18" charset="0"/>
-                <a:cs typeface="Times New Roman" panose="02020603050405020304" pitchFamily="18" charset="0"/>
-              </a:rPr>
-              <a:t>Therefore, a smart system is needed to improve credit risk prediction using machine learning techniques.</a:t>
+              <a:t>of individuals who lack sufficient credit records.</a:t>
             </a:r>
           </a:p>
         </p:txBody>
@@ -9764,6 +9398,13 @@
   <p:clrMapOvr>
     <a:masterClrMapping/>
   </p:clrMapOvr>
+  <p:timing>
+    <p:tnLst>
+      <p:par>
+        <p:cTn id="1" dur="indefinite" restart="never" nodeType="tmRoot"/>
+      </p:par>
+    </p:tnLst>
+  </p:timing>
 </p:sld>
 </file>
 
@@ -9958,6 +9599,13 @@
   <p:clrMapOvr>
     <a:masterClrMapping/>
   </p:clrMapOvr>
+  <p:timing>
+    <p:tnLst>
+      <p:par>
+        <p:cTn id="1" dur="indefinite" restart="never" nodeType="tmRoot"/>
+      </p:par>
+    </p:tnLst>
+  </p:timing>
 </p:sld>
 </file>
 
@@ -10080,7 +9728,7 @@
           <p:nvPr>
             <p:extLst>
               <p:ext uri="{D42A27DB-BD31-4B8C-83A1-F6EECF244321}">
-                <p14:modId xmlns:p14="http://schemas.microsoft.com/office/powerpoint/2010/main" val="827692576"/>
+                <p14:modId xmlns:p14="http://schemas.microsoft.com/office/powerpoint/2010/main" val="3318226803"/>
               </p:ext>
             </p:extLst>
           </p:nvPr>
@@ -10651,7 +10299,42 @@
                           <a:latin typeface="Times New Roman" pitchFamily="18" charset="0"/>
                           <a:cs typeface="Times New Roman" pitchFamily="18" charset="0"/>
                         </a:rPr>
-                        <a:t>DRA-CS method using DCOV-SDR for sufficient dimension reduction combined with logistic regression.</a:t>
+                        <a:t>Dimension</a:t>
+                      </a:r>
+                      <a:r>
+                        <a:rPr lang="en-US" baseline="0" dirty="0" smtClean="0">
+                          <a:latin typeface="Times New Roman" pitchFamily="18" charset="0"/>
+                          <a:cs typeface="Times New Roman" pitchFamily="18" charset="0"/>
+                        </a:rPr>
+                        <a:t> Reduction Approach for Classification systems</a:t>
+                      </a:r>
+                      <a:r>
+                        <a:rPr lang="en-US" dirty="0" smtClean="0">
+                          <a:latin typeface="Times New Roman" pitchFamily="18" charset="0"/>
+                          <a:cs typeface="Times New Roman" pitchFamily="18" charset="0"/>
+                        </a:rPr>
+                        <a:t> </a:t>
+                      </a:r>
+                      <a:r>
+                        <a:rPr lang="en-US" dirty="0" smtClean="0">
+                          <a:latin typeface="Times New Roman" pitchFamily="18" charset="0"/>
+                          <a:cs typeface="Times New Roman" pitchFamily="18" charset="0"/>
+                        </a:rPr>
+                        <a:t>method using </a:t>
+                      </a:r>
+                      <a:r>
+                        <a:rPr lang="en-US" dirty="0" smtClean="0">
+                          <a:latin typeface="Times New Roman" pitchFamily="18" charset="0"/>
+                          <a:cs typeface="Times New Roman" pitchFamily="18" charset="0"/>
+                        </a:rPr>
+                        <a:t>Distance Covariance-Sufficient Dimension Reduction </a:t>
+                      </a:r>
+                      <a:r>
+                        <a:rPr lang="en-US" dirty="0" smtClean="0">
+                          <a:latin typeface="Times New Roman" pitchFamily="18" charset="0"/>
+                          <a:cs typeface="Times New Roman" pitchFamily="18" charset="0"/>
+                        </a:rPr>
+                        <a:t>for sufficient dimension reduction combined with logistic regression.</a:t>
                       </a:r>
                       <a:endParaRPr lang="en-US" sz="1800" dirty="0">
                         <a:latin typeface="Times New Roman" pitchFamily="18" charset="0"/>
@@ -10974,619 +10657,6 @@
           <a:chExt cx="0" cy="0"/>
         </a:xfrm>
       </p:grpSpPr>
-      <p:graphicFrame>
-        <p:nvGraphicFramePr>
-          <p:cNvPr id="4" name="Table 3"/>
-          <p:cNvGraphicFramePr>
-            <a:graphicFrameLocks noGrp="1"/>
-          </p:cNvGraphicFramePr>
-          <p:nvPr>
-            <p:extLst>
-              <p:ext uri="{D42A27DB-BD31-4B8C-83A1-F6EECF244321}">
-                <p14:modId xmlns:p14="http://schemas.microsoft.com/office/powerpoint/2010/main" val="1312265951"/>
-              </p:ext>
-            </p:extLst>
-          </p:nvPr>
-        </p:nvGraphicFramePr>
-        <p:xfrm>
-          <a:off x="1682259" y="1696665"/>
-          <a:ext cx="9595340" cy="3492137"/>
-        </p:xfrm>
-        <a:graphic>
-          <a:graphicData uri="http://schemas.openxmlformats.org/drawingml/2006/table">
-            <a:tbl>
-              <a:tblPr firstRow="1" bandRow="1">
-                <a:tableStyleId>{5940675A-B579-460E-94D1-54222C63F5DA}</a:tableStyleId>
-              </a:tblPr>
-              <a:tblGrid>
-                <a:gridCol w="2170858">
-                  <a:extLst>
-                    <a:ext uri="{9D8B030D-6E8A-4147-A177-3AD203B41FA5}">
-                      <a16:colId xmlns:a16="http://schemas.microsoft.com/office/drawing/2014/main" val="20000"/>
-                    </a:ext>
-                  </a:extLst>
-                </a:gridCol>
-                <a:gridCol w="2521652">
-                  <a:extLst>
-                    <a:ext uri="{9D8B030D-6E8A-4147-A177-3AD203B41FA5}">
-                      <a16:colId xmlns:a16="http://schemas.microsoft.com/office/drawing/2014/main" val="20001"/>
-                    </a:ext>
-                  </a:extLst>
-                </a:gridCol>
-                <a:gridCol w="4902830">
-                  <a:extLst>
-                    <a:ext uri="{9D8B030D-6E8A-4147-A177-3AD203B41FA5}">
-                      <a16:colId xmlns:a16="http://schemas.microsoft.com/office/drawing/2014/main" val="20002"/>
-                    </a:ext>
-                  </a:extLst>
-                </a:gridCol>
-              </a:tblGrid>
-              <a:tr h="2029097">
-                <a:tc>
-                  <a:txBody>
-                    <a:bodyPr/>
-                    <a:lstStyle/>
-                    <a:p>
-                      <a:pPr marL="0" marR="0" indent="0" algn="l" defTabSz="914400" rtl="0" eaLnBrk="1" fontAlgn="auto" latinLnBrk="0" hangingPunct="1">
-                        <a:lnSpc>
-                          <a:spcPct val="100000"/>
-                        </a:lnSpc>
-                        <a:spcBef>
-                          <a:spcPts val="0"/>
-                        </a:spcBef>
-                        <a:spcAft>
-                          <a:spcPts val="0"/>
-                        </a:spcAft>
-                        <a:buClrTx/>
-                        <a:buSzTx/>
-                        <a:buFontTx/>
-                        <a:buNone/>
-                        <a:tabLst/>
-                        <a:defRPr/>
-                      </a:pPr>
-                      <a:r>
-                        <a:rPr lang="en-US" b="0" dirty="0" smtClean="0">
-                          <a:latin typeface="Times New Roman" pitchFamily="18" charset="0"/>
-                          <a:cs typeface="Times New Roman" pitchFamily="18" charset="0"/>
-                        </a:rPr>
-                        <a:t>Evaluating AI-Driven Credit Scoring Models versus Traditional Statistical Techniques [4]</a:t>
-                      </a:r>
-                      <a:endParaRPr lang="en-US" b="0" dirty="0">
-                        <a:latin typeface="Times New Roman" pitchFamily="18" charset="0"/>
-                        <a:cs typeface="Times New Roman" pitchFamily="18" charset="0"/>
-                      </a:endParaRPr>
-                    </a:p>
-                  </a:txBody>
-                  <a:tcPr>
-                    <a:lnL w="12700" cap="flat" cmpd="sng" algn="ctr">
-                      <a:solidFill>
-                        <a:schemeClr val="tx1"/>
-                      </a:solidFill>
-                      <a:prstDash val="solid"/>
-                      <a:round/>
-                      <a:headEnd type="none" w="med" len="med"/>
-                      <a:tailEnd type="none" w="med" len="med"/>
-                    </a:lnL>
-                    <a:lnR w="12700" cap="flat" cmpd="sng" algn="ctr">
-                      <a:solidFill>
-                        <a:schemeClr val="tx1"/>
-                      </a:solidFill>
-                      <a:prstDash val="solid"/>
-                      <a:round/>
-                      <a:headEnd type="none" w="med" len="med"/>
-                      <a:tailEnd type="none" w="med" len="med"/>
-                    </a:lnR>
-                    <a:lnT w="12700" cap="flat" cmpd="sng" algn="ctr">
-                      <a:solidFill>
-                        <a:schemeClr val="tx1"/>
-                      </a:solidFill>
-                      <a:prstDash val="solid"/>
-                      <a:round/>
-                      <a:headEnd type="none" w="med" len="med"/>
-                      <a:tailEnd type="none" w="med" len="med"/>
-                    </a:lnT>
-                    <a:lnB w="12700" cap="flat" cmpd="sng" algn="ctr">
-                      <a:solidFill>
-                        <a:schemeClr val="tx1"/>
-                      </a:solidFill>
-                      <a:prstDash val="solid"/>
-                      <a:round/>
-                      <a:headEnd type="none" w="med" len="med"/>
-                      <a:tailEnd type="none" w="med" len="med"/>
-                    </a:lnB>
-                  </a:tcPr>
-                </a:tc>
-                <a:tc>
-                  <a:txBody>
-                    <a:bodyPr/>
-                    <a:lstStyle/>
-                    <a:p>
-                      <a:r>
-                        <a:rPr lang="it-IT" b="0" dirty="0" smtClean="0">
-                          <a:latin typeface="Times New Roman" pitchFamily="18" charset="0"/>
-                          <a:cs typeface="Times New Roman" pitchFamily="18" charset="0"/>
-                        </a:rPr>
-                        <a:t>Dipak S. Vakrani et al. [2026]</a:t>
-                      </a:r>
-                      <a:endParaRPr lang="en-US" b="0" dirty="0">
-                        <a:latin typeface="Times New Roman" pitchFamily="18" charset="0"/>
-                        <a:cs typeface="Times New Roman" pitchFamily="18" charset="0"/>
-                      </a:endParaRPr>
-                    </a:p>
-                  </a:txBody>
-                  <a:tcPr>
-                    <a:lnL w="12700" cap="flat" cmpd="sng" algn="ctr">
-                      <a:solidFill>
-                        <a:schemeClr val="tx1"/>
-                      </a:solidFill>
-                      <a:prstDash val="solid"/>
-                      <a:round/>
-                      <a:headEnd type="none" w="med" len="med"/>
-                      <a:tailEnd type="none" w="med" len="med"/>
-                    </a:lnL>
-                    <a:lnR w="12700" cap="flat" cmpd="sng" algn="ctr">
-                      <a:solidFill>
-                        <a:schemeClr val="tx1"/>
-                      </a:solidFill>
-                      <a:prstDash val="solid"/>
-                      <a:round/>
-                      <a:headEnd type="none" w="med" len="med"/>
-                      <a:tailEnd type="none" w="med" len="med"/>
-                    </a:lnR>
-                    <a:lnT w="12700" cap="flat" cmpd="sng" algn="ctr">
-                      <a:solidFill>
-                        <a:schemeClr val="tx1"/>
-                      </a:solidFill>
-                      <a:prstDash val="solid"/>
-                      <a:round/>
-                      <a:headEnd type="none" w="med" len="med"/>
-                      <a:tailEnd type="none" w="med" len="med"/>
-                    </a:lnT>
-                    <a:lnB w="12700" cap="flat" cmpd="sng" algn="ctr">
-                      <a:solidFill>
-                        <a:schemeClr val="tx1"/>
-                      </a:solidFill>
-                      <a:prstDash val="solid"/>
-                      <a:round/>
-                      <a:headEnd type="none" w="med" len="med"/>
-                      <a:tailEnd type="none" w="med" len="med"/>
-                    </a:lnB>
-                  </a:tcPr>
-                </a:tc>
-                <a:tc>
-                  <a:txBody>
-                    <a:bodyPr/>
-                    <a:lstStyle/>
-                    <a:p>
-                      <a:r>
-                        <a:rPr lang="en-US" dirty="0" smtClean="0">
-                          <a:latin typeface="Times New Roman" pitchFamily="18" charset="0"/>
-                          <a:cs typeface="Times New Roman" pitchFamily="18" charset="0"/>
-                        </a:rPr>
-                        <a:t>Comparative study of Logistic Regression, Decision Tree, </a:t>
-                      </a:r>
-                      <a:r>
-                        <a:rPr lang="en-US" dirty="0" err="1" smtClean="0">
-                          <a:latin typeface="Times New Roman" pitchFamily="18" charset="0"/>
-                          <a:cs typeface="Times New Roman" pitchFamily="18" charset="0"/>
-                        </a:rPr>
-                        <a:t>XGBoost</a:t>
-                      </a:r>
-                      <a:r>
-                        <a:rPr lang="en-US" dirty="0" smtClean="0">
-                          <a:latin typeface="Times New Roman" pitchFamily="18" charset="0"/>
-                          <a:cs typeface="Times New Roman" pitchFamily="18" charset="0"/>
-                        </a:rPr>
-                        <a:t>, and Neural Networks with SHAP-based </a:t>
-                      </a:r>
-                      <a:r>
-                        <a:rPr lang="en-US" dirty="0" err="1" smtClean="0">
-                          <a:latin typeface="Times New Roman" pitchFamily="18" charset="0"/>
-                          <a:cs typeface="Times New Roman" pitchFamily="18" charset="0"/>
-                        </a:rPr>
-                        <a:t>explainability</a:t>
-                      </a:r>
-                      <a:r>
-                        <a:rPr lang="en-US" dirty="0" smtClean="0">
-                          <a:latin typeface="Times New Roman" pitchFamily="18" charset="0"/>
-                          <a:cs typeface="Times New Roman" pitchFamily="18" charset="0"/>
-                        </a:rPr>
-                        <a:t> and stress testing.</a:t>
-                      </a:r>
-                      <a:endParaRPr lang="en-US" b="0" dirty="0">
-                        <a:latin typeface="Times New Roman" pitchFamily="18" charset="0"/>
-                        <a:cs typeface="Times New Roman" pitchFamily="18" charset="0"/>
-                      </a:endParaRPr>
-                    </a:p>
-                  </a:txBody>
-                  <a:tcPr>
-                    <a:lnL w="12700" cap="flat" cmpd="sng" algn="ctr">
-                      <a:solidFill>
-                        <a:schemeClr val="tx1"/>
-                      </a:solidFill>
-                      <a:prstDash val="solid"/>
-                      <a:round/>
-                      <a:headEnd type="none" w="med" len="med"/>
-                      <a:tailEnd type="none" w="med" len="med"/>
-                    </a:lnL>
-                    <a:lnR w="12700" cap="flat" cmpd="sng" algn="ctr">
-                      <a:solidFill>
-                        <a:schemeClr val="tx1"/>
-                      </a:solidFill>
-                      <a:prstDash val="solid"/>
-                      <a:round/>
-                      <a:headEnd type="none" w="med" len="med"/>
-                      <a:tailEnd type="none" w="med" len="med"/>
-                    </a:lnR>
-                    <a:lnT w="12700" cap="flat" cmpd="sng" algn="ctr">
-                      <a:solidFill>
-                        <a:schemeClr val="tx1"/>
-                      </a:solidFill>
-                      <a:prstDash val="solid"/>
-                      <a:round/>
-                      <a:headEnd type="none" w="med" len="med"/>
-                      <a:tailEnd type="none" w="med" len="med"/>
-                    </a:lnT>
-                    <a:lnB w="12700" cap="flat" cmpd="sng" algn="ctr">
-                      <a:solidFill>
-                        <a:schemeClr val="tx1"/>
-                      </a:solidFill>
-                      <a:prstDash val="solid"/>
-                      <a:round/>
-                      <a:headEnd type="none" w="med" len="med"/>
-                      <a:tailEnd type="none" w="med" len="med"/>
-                    </a:lnB>
-                  </a:tcPr>
-                </a:tc>
-                <a:extLst>
-                  <a:ext uri="{0D108BD9-81ED-4DB2-BD59-A6C34878D82A}">
-                    <a16:rowId xmlns:a16="http://schemas.microsoft.com/office/drawing/2014/main" val="10001"/>
-                  </a:ext>
-                </a:extLst>
-              </a:tr>
-              <a:tr h="1356803">
-                <a:tc>
-                  <a:txBody>
-                    <a:bodyPr/>
-                    <a:lstStyle/>
-                    <a:p>
-                      <a:pPr algn="just"/>
-                      <a:r>
-                        <a:rPr lang="en-US" b="0" dirty="0" smtClean="0">
-                          <a:latin typeface="Times New Roman" pitchFamily="18" charset="0"/>
-                          <a:cs typeface="Times New Roman" pitchFamily="18" charset="0"/>
-                        </a:rPr>
-                        <a:t>Machine Learning Powered Financial Credit Scoring: A Systematic Literature Review[5]</a:t>
-                      </a:r>
-                      <a:endParaRPr lang="en-US" b="0" dirty="0">
-                        <a:latin typeface="Times New Roman" pitchFamily="18" charset="0"/>
-                        <a:cs typeface="Times New Roman" pitchFamily="18" charset="0"/>
-                      </a:endParaRPr>
-                    </a:p>
-                  </a:txBody>
-                  <a:tcPr>
-                    <a:lnL w="12700" cap="flat" cmpd="sng" algn="ctr">
-                      <a:solidFill>
-                        <a:schemeClr val="tx1"/>
-                      </a:solidFill>
-                      <a:prstDash val="solid"/>
-                      <a:round/>
-                      <a:headEnd type="none" w="med" len="med"/>
-                      <a:tailEnd type="none" w="med" len="med"/>
-                    </a:lnL>
-                    <a:lnR w="12700" cap="flat" cmpd="sng" algn="ctr">
-                      <a:solidFill>
-                        <a:schemeClr val="tx1"/>
-                      </a:solidFill>
-                      <a:prstDash val="solid"/>
-                      <a:round/>
-                      <a:headEnd type="none" w="med" len="med"/>
-                      <a:tailEnd type="none" w="med" len="med"/>
-                    </a:lnR>
-                    <a:lnT w="12700" cap="flat" cmpd="sng" algn="ctr">
-                      <a:solidFill>
-                        <a:schemeClr val="tx1"/>
-                      </a:solidFill>
-                      <a:prstDash val="solid"/>
-                      <a:round/>
-                      <a:headEnd type="none" w="med" len="med"/>
-                      <a:tailEnd type="none" w="med" len="med"/>
-                    </a:lnT>
-                    <a:lnB w="12700" cap="flat" cmpd="sng" algn="ctr">
-                      <a:solidFill>
-                        <a:schemeClr val="tx1"/>
-                      </a:solidFill>
-                      <a:prstDash val="solid"/>
-                      <a:round/>
-                      <a:headEnd type="none" w="med" len="med"/>
-                      <a:tailEnd type="none" w="med" len="med"/>
-                    </a:lnB>
-                  </a:tcPr>
-                </a:tc>
-                <a:tc>
-                  <a:txBody>
-                    <a:bodyPr/>
-                    <a:lstStyle/>
-                    <a:p>
-                      <a:r>
-                        <a:rPr lang="en-US" b="0" dirty="0" err="1" smtClean="0">
-                          <a:latin typeface="Times New Roman" pitchFamily="18" charset="0"/>
-                          <a:cs typeface="Times New Roman" pitchFamily="18" charset="0"/>
-                        </a:rPr>
-                        <a:t>Helmi</a:t>
-                      </a:r>
-                      <a:r>
-                        <a:rPr lang="en-US" b="0" dirty="0" smtClean="0">
-                          <a:latin typeface="Times New Roman" pitchFamily="18" charset="0"/>
-                          <a:cs typeface="Times New Roman" pitchFamily="18" charset="0"/>
-                        </a:rPr>
-                        <a:t> </a:t>
-                      </a:r>
-                      <a:r>
-                        <a:rPr lang="en-US" b="0" dirty="0" err="1" smtClean="0">
-                          <a:latin typeface="Times New Roman" pitchFamily="18" charset="0"/>
-                          <a:cs typeface="Times New Roman" pitchFamily="18" charset="0"/>
-                        </a:rPr>
-                        <a:t>Ayari</a:t>
-                      </a:r>
-                      <a:r>
-                        <a:rPr lang="en-US" b="0" dirty="0" smtClean="0">
-                          <a:latin typeface="Times New Roman" pitchFamily="18" charset="0"/>
-                          <a:cs typeface="Times New Roman" pitchFamily="18" charset="0"/>
-                        </a:rPr>
-                        <a:t> et al. [2026]</a:t>
-                      </a:r>
-                      <a:endParaRPr lang="en-US" b="0" dirty="0">
-                        <a:latin typeface="Times New Roman" pitchFamily="18" charset="0"/>
-                        <a:cs typeface="Times New Roman" pitchFamily="18" charset="0"/>
-                      </a:endParaRPr>
-                    </a:p>
-                  </a:txBody>
-                  <a:tcPr>
-                    <a:lnL w="12700" cap="flat" cmpd="sng" algn="ctr">
-                      <a:solidFill>
-                        <a:schemeClr val="tx1"/>
-                      </a:solidFill>
-                      <a:prstDash val="solid"/>
-                      <a:round/>
-                      <a:headEnd type="none" w="med" len="med"/>
-                      <a:tailEnd type="none" w="med" len="med"/>
-                    </a:lnL>
-                    <a:lnR w="12700" cap="flat" cmpd="sng" algn="ctr">
-                      <a:solidFill>
-                        <a:schemeClr val="tx1"/>
-                      </a:solidFill>
-                      <a:prstDash val="solid"/>
-                      <a:round/>
-                      <a:headEnd type="none" w="med" len="med"/>
-                      <a:tailEnd type="none" w="med" len="med"/>
-                    </a:lnR>
-                    <a:lnT w="12700" cap="flat" cmpd="sng" algn="ctr">
-                      <a:solidFill>
-                        <a:schemeClr val="tx1"/>
-                      </a:solidFill>
-                      <a:prstDash val="solid"/>
-                      <a:round/>
-                      <a:headEnd type="none" w="med" len="med"/>
-                      <a:tailEnd type="none" w="med" len="med"/>
-                    </a:lnT>
-                    <a:lnB w="12700" cap="flat" cmpd="sng" algn="ctr">
-                      <a:solidFill>
-                        <a:schemeClr val="tx1"/>
-                      </a:solidFill>
-                      <a:prstDash val="solid"/>
-                      <a:round/>
-                      <a:headEnd type="none" w="med" len="med"/>
-                      <a:tailEnd type="none" w="med" len="med"/>
-                    </a:lnB>
-                  </a:tcPr>
-                </a:tc>
-                <a:tc>
-                  <a:txBody>
-                    <a:bodyPr/>
-                    <a:lstStyle/>
-                    <a:p>
-                      <a:r>
-                        <a:rPr lang="en-US" b="0" dirty="0" smtClean="0">
-                          <a:latin typeface="Times New Roman" pitchFamily="18" charset="0"/>
-                          <a:cs typeface="Times New Roman" pitchFamily="18" charset="0"/>
-                        </a:rPr>
-                        <a:t>Systematic review of ML, DL, and ensemble learning models used in credit scoring (2018–2024)</a:t>
-                      </a:r>
-                      <a:endParaRPr lang="en-US" b="0" dirty="0">
-                        <a:latin typeface="Times New Roman" pitchFamily="18" charset="0"/>
-                        <a:cs typeface="Times New Roman" pitchFamily="18" charset="0"/>
-                      </a:endParaRPr>
-                    </a:p>
-                  </a:txBody>
-                  <a:tcPr>
-                    <a:lnL w="12700" cap="flat" cmpd="sng" algn="ctr">
-                      <a:solidFill>
-                        <a:schemeClr val="tx1"/>
-                      </a:solidFill>
-                      <a:prstDash val="solid"/>
-                      <a:round/>
-                      <a:headEnd type="none" w="med" len="med"/>
-                      <a:tailEnd type="none" w="med" len="med"/>
-                    </a:lnL>
-                    <a:lnR w="12700" cap="flat" cmpd="sng" algn="ctr">
-                      <a:solidFill>
-                        <a:schemeClr val="tx1"/>
-                      </a:solidFill>
-                      <a:prstDash val="solid"/>
-                      <a:round/>
-                      <a:headEnd type="none" w="med" len="med"/>
-                      <a:tailEnd type="none" w="med" len="med"/>
-                    </a:lnR>
-                    <a:lnT w="12700" cap="flat" cmpd="sng" algn="ctr">
-                      <a:solidFill>
-                        <a:schemeClr val="tx1"/>
-                      </a:solidFill>
-                      <a:prstDash val="solid"/>
-                      <a:round/>
-                      <a:headEnd type="none" w="med" len="med"/>
-                      <a:tailEnd type="none" w="med" len="med"/>
-                    </a:lnT>
-                    <a:lnB w="12700" cap="flat" cmpd="sng" algn="ctr">
-                      <a:solidFill>
-                        <a:schemeClr val="tx1"/>
-                      </a:solidFill>
-                      <a:prstDash val="solid"/>
-                      <a:round/>
-                      <a:headEnd type="none" w="med" len="med"/>
-                      <a:tailEnd type="none" w="med" len="med"/>
-                    </a:lnB>
-                  </a:tcPr>
-                </a:tc>
-                <a:extLst>
-                  <a:ext uri="{0D108BD9-81ED-4DB2-BD59-A6C34878D82A}">
-                    <a16:rowId xmlns:a16="http://schemas.microsoft.com/office/drawing/2014/main" val="10002"/>
-                  </a:ext>
-                </a:extLst>
-              </a:tr>
-            </a:tbl>
-          </a:graphicData>
-        </a:graphic>
-      </p:graphicFrame>
-      <p:sp>
-        <p:nvSpPr>
-          <p:cNvPr id="3" name="PlaceHolder 1"/>
-          <p:cNvSpPr>
-            <a:spLocks noGrp="1"/>
-          </p:cNvSpPr>
-          <p:nvPr>
-            <p:ph type="title"/>
-          </p:nvPr>
-        </p:nvSpPr>
-        <p:spPr>
-          <a:xfrm>
-            <a:off x="3184601" y="128591"/>
-            <a:ext cx="6590657" cy="618840"/>
-          </a:xfrm>
-          <a:prstGeom prst="rect">
-            <a:avLst/>
-          </a:prstGeom>
-          <a:noFill/>
-          <a:ln w="0">
-            <a:noFill/>
-          </a:ln>
-        </p:spPr>
-        <p:txBody>
-          <a:bodyPr vert="horz" lIns="0" tIns="0" rIns="0" bIns="0" numCol="1" spcCol="0" rtlCol="0" anchor="t">
-            <a:noAutofit/>
-          </a:bodyPr>
-          <a:lstStyle/>
-          <a:p>
-            <a:pPr algn="ctr">
-              <a:lnSpc>
-                <a:spcPct val="100000"/>
-              </a:lnSpc>
-              <a:buNone/>
-            </a:pPr>
-            <a:r>
-              <a:rPr lang="en-US" b="1" spc="-1" dirty="0">
-                <a:solidFill>
-                  <a:srgbClr val="00B0F0"/>
-                </a:solidFill>
-                <a:latin typeface="Times New Roman"/>
-                <a:ea typeface="Noto Sans CJK SC"/>
-              </a:rPr>
-              <a:t>Literature Review</a:t>
-            </a:r>
-            <a:endParaRPr lang="en-IN" spc="-1" dirty="0">
-              <a:solidFill>
-                <a:srgbClr val="00B0F0"/>
-              </a:solidFill>
-              <a:latin typeface="Arial"/>
-            </a:endParaRPr>
-          </a:p>
-        </p:txBody>
-      </p:sp>
-      <p:pic>
-        <p:nvPicPr>
-          <p:cNvPr id="5" name="Picture 4"/>
-          <p:cNvPicPr>
-            <a:picLocks noChangeAspect="1"/>
-          </p:cNvPicPr>
-          <p:nvPr/>
-        </p:nvPicPr>
-        <p:blipFill>
-          <a:blip r:embed="rId2"/>
-          <a:stretch>
-            <a:fillRect/>
-          </a:stretch>
-        </p:blipFill>
-        <p:spPr>
-          <a:xfrm>
-            <a:off x="9518469" y="-62222"/>
-            <a:ext cx="2673531" cy="1782354"/>
-          </a:xfrm>
-          <a:prstGeom prst="rect">
-            <a:avLst/>
-          </a:prstGeom>
-        </p:spPr>
-      </p:pic>
-      <p:pic>
-        <p:nvPicPr>
-          <p:cNvPr id="6" name="Picture 5"/>
-          <p:cNvPicPr>
-            <a:picLocks noChangeAspect="1"/>
-          </p:cNvPicPr>
-          <p:nvPr/>
-        </p:nvPicPr>
-        <p:blipFill>
-          <a:blip r:embed="rId3"/>
-          <a:stretch>
-            <a:fillRect/>
-          </a:stretch>
-        </p:blipFill>
-        <p:spPr>
-          <a:xfrm>
-            <a:off x="533859" y="74036"/>
-            <a:ext cx="2044320" cy="1362880"/>
-          </a:xfrm>
-          <a:prstGeom prst="rect">
-            <a:avLst/>
-          </a:prstGeom>
-        </p:spPr>
-      </p:pic>
-    </p:spTree>
-    <p:extLst>
-      <p:ext uri="{BB962C8B-B14F-4D97-AF65-F5344CB8AC3E}">
-        <p14:creationId xmlns:p14="http://schemas.microsoft.com/office/powerpoint/2010/main" val="2895162788"/>
-      </p:ext>
-    </p:extLst>
-  </p:cSld>
-  <p:clrMapOvr>
-    <a:masterClrMapping/>
-  </p:clrMapOvr>
-  <p:timing>
-    <p:tnLst>
-      <p:par>
-        <p:cTn id="1" dur="indefinite" restart="never" nodeType="tmRoot"/>
-      </p:par>
-    </p:tnLst>
-  </p:timing>
-</p:sld>
-</file>
-
-<file path=ppt/slides/slide8.xml><?xml version="1.0" encoding="utf-8"?>
-<p:sld xmlns:a="http://schemas.openxmlformats.org/drawingml/2006/main" xmlns:r="http://schemas.openxmlformats.org/officeDocument/2006/relationships" xmlns:p="http://schemas.openxmlformats.org/presentationml/2006/main">
-  <p:cSld>
-    <p:spTree>
-      <p:nvGrpSpPr>
-        <p:cNvPr id="1" name=""/>
-        <p:cNvGrpSpPr/>
-        <p:nvPr/>
-      </p:nvGrpSpPr>
-      <p:grpSpPr>
-        <a:xfrm>
-          <a:off x="0" y="0"/>
-          <a:ext cx="0" cy="0"/>
-          <a:chOff x="0" y="0"/>
-          <a:chExt cx="0" cy="0"/>
-        </a:xfrm>
-      </p:grpSpPr>
       <p:sp>
         <p:nvSpPr>
           <p:cNvPr id="3" name="Content Placeholder 2"/>
@@ -11599,7 +10669,7 @@
         </p:nvSpPr>
         <p:spPr>
           <a:xfrm>
-            <a:off x="923110" y="1524000"/>
+            <a:off x="923109" y="1785257"/>
             <a:ext cx="10731008" cy="4625788"/>
           </a:xfrm>
         </p:spPr>
@@ -11779,108 +10849,6 @@
               </a:rPr>
               <a:t>profile.</a:t>
             </a:r>
-          </a:p>
-          <a:p>
-            <a:pPr algn="just"/>
-            <a:r>
-              <a:rPr lang="en-US" altLang="en-US" sz="2400" b="1" dirty="0" smtClean="0">
-                <a:solidFill>
-                  <a:schemeClr val="tx1"/>
-                </a:solidFill>
-                <a:latin typeface="Times New Roman" panose="02020603050405020304" pitchFamily="18" charset="0"/>
-                <a:cs typeface="Times New Roman" panose="02020603050405020304" pitchFamily="18" charset="0"/>
-              </a:rPr>
-              <a:t>Transparent </a:t>
-            </a:r>
-            <a:r>
-              <a:rPr lang="en-US" altLang="en-US" sz="2400" b="1" dirty="0">
-                <a:solidFill>
-                  <a:schemeClr val="tx1"/>
-                </a:solidFill>
-                <a:latin typeface="Times New Roman" panose="02020603050405020304" pitchFamily="18" charset="0"/>
-                <a:cs typeface="Times New Roman" panose="02020603050405020304" pitchFamily="18" charset="0"/>
-              </a:rPr>
-              <a:t>Decision Making</a:t>
-            </a:r>
-            <a:r>
-              <a:rPr lang="en-US" altLang="en-US" sz="2400" dirty="0">
-                <a:solidFill>
-                  <a:schemeClr val="tx1"/>
-                </a:solidFill>
-                <a:latin typeface="Times New Roman" panose="02020603050405020304" pitchFamily="18" charset="0"/>
-                <a:cs typeface="Times New Roman" panose="02020603050405020304" pitchFamily="18" charset="0"/>
-              </a:rPr>
-              <a:t> – Explainable AI methods such as </a:t>
-            </a:r>
-            <a:r>
-              <a:rPr lang="en-US" altLang="en-US" sz="2400" b="1" dirty="0">
-                <a:solidFill>
-                  <a:schemeClr val="tx1"/>
-                </a:solidFill>
-                <a:latin typeface="Times New Roman" panose="02020603050405020304" pitchFamily="18" charset="0"/>
-                <a:cs typeface="Times New Roman" panose="02020603050405020304" pitchFamily="18" charset="0"/>
-              </a:rPr>
-              <a:t>SHAP (</a:t>
-            </a:r>
-            <a:r>
-              <a:rPr lang="en-US" altLang="en-US" sz="2400" b="1" dirty="0" err="1">
-                <a:solidFill>
-                  <a:schemeClr val="tx1"/>
-                </a:solidFill>
-                <a:latin typeface="Times New Roman" panose="02020603050405020304" pitchFamily="18" charset="0"/>
-                <a:cs typeface="Times New Roman" panose="02020603050405020304" pitchFamily="18" charset="0"/>
-              </a:rPr>
-              <a:t>SHapley</a:t>
-            </a:r>
-            <a:r>
-              <a:rPr lang="en-US" altLang="en-US" sz="2400" b="1" dirty="0">
-                <a:solidFill>
-                  <a:schemeClr val="tx1"/>
-                </a:solidFill>
-                <a:latin typeface="Times New Roman" panose="02020603050405020304" pitchFamily="18" charset="0"/>
-                <a:cs typeface="Times New Roman" panose="02020603050405020304" pitchFamily="18" charset="0"/>
-              </a:rPr>
-              <a:t> Additive </a:t>
-            </a:r>
-            <a:r>
-              <a:rPr lang="en-US" altLang="en-US" sz="2400" b="1" dirty="0" err="1">
-                <a:solidFill>
-                  <a:schemeClr val="tx1"/>
-                </a:solidFill>
-                <a:latin typeface="Times New Roman" panose="02020603050405020304" pitchFamily="18" charset="0"/>
-                <a:cs typeface="Times New Roman" panose="02020603050405020304" pitchFamily="18" charset="0"/>
-              </a:rPr>
-              <a:t>exPlanations</a:t>
-            </a:r>
-            <a:r>
-              <a:rPr lang="en-US" altLang="en-US" sz="2400" b="1" dirty="0">
-                <a:solidFill>
-                  <a:schemeClr val="tx1"/>
-                </a:solidFill>
-                <a:latin typeface="Times New Roman" panose="02020603050405020304" pitchFamily="18" charset="0"/>
-                <a:cs typeface="Times New Roman" panose="02020603050405020304" pitchFamily="18" charset="0"/>
-              </a:rPr>
-              <a:t>)</a:t>
-            </a:r>
-            <a:r>
-              <a:rPr lang="en-US" altLang="en-US" sz="2400" dirty="0">
-                <a:solidFill>
-                  <a:schemeClr val="tx1"/>
-                </a:solidFill>
-                <a:latin typeface="Times New Roman" panose="02020603050405020304" pitchFamily="18" charset="0"/>
-                <a:cs typeface="Times New Roman" panose="02020603050405020304" pitchFamily="18" charset="0"/>
-              </a:rPr>
-              <a:t> help explain why a loan is approved or rejected.</a:t>
-            </a:r>
-          </a:p>
-          <a:p>
-            <a:pPr marL="0" indent="0" algn="just">
-              <a:buNone/>
-            </a:pPr>
-            <a:endParaRPr lang="en-IN" sz="2400" dirty="0">
-              <a:latin typeface="Times New Roman" panose="02020603050405020304" pitchFamily="18" charset="0"/>
-              <a:cs typeface="Times New Roman" panose="02020603050405020304" pitchFamily="18" charset="0"/>
-            </a:endParaRPr>
           </a:p>
         </p:txBody>
       </p:sp>
@@ -11996,10 +10964,17 @@
   <p:clrMapOvr>
     <a:masterClrMapping/>
   </p:clrMapOvr>
+  <p:timing>
+    <p:tnLst>
+      <p:par>
+        <p:cTn id="1" dur="indefinite" restart="never" nodeType="tmRoot"/>
+      </p:par>
+    </p:tnLst>
+  </p:timing>
 </p:sld>
 </file>
 
-<file path=ppt/slides/slide9.xml><?xml version="1.0" encoding="utf-8"?>
+<file path=ppt/slides/slide8.xml><?xml version="1.0" encoding="utf-8"?>
 <p:sld xmlns:a="http://schemas.openxmlformats.org/drawingml/2006/main" xmlns:r="http://schemas.openxmlformats.org/officeDocument/2006/relationships" xmlns:p="http://schemas.openxmlformats.org/presentationml/2006/main">
   <p:cSld>
     <p:spTree>
@@ -12312,6 +11287,345 @@
   <p:clrMapOvr>
     <a:masterClrMapping/>
   </p:clrMapOvr>
+  <p:timing>
+    <p:tnLst>
+      <p:par>
+        <p:cTn id="1" dur="indefinite" restart="never" nodeType="tmRoot"/>
+      </p:par>
+    </p:tnLst>
+  </p:timing>
+</p:sld>
+</file>
+
+<file path=ppt/slides/slide9.xml><?xml version="1.0" encoding="utf-8"?>
+<p:sld xmlns:a="http://schemas.openxmlformats.org/drawingml/2006/main" xmlns:r="http://schemas.openxmlformats.org/officeDocument/2006/relationships" xmlns:p="http://schemas.openxmlformats.org/presentationml/2006/main">
+  <p:cSld>
+    <p:spTree>
+      <p:nvGrpSpPr>
+        <p:cNvPr id="1" name=""/>
+        <p:cNvGrpSpPr/>
+        <p:nvPr/>
+      </p:nvGrpSpPr>
+      <p:grpSpPr>
+        <a:xfrm>
+          <a:off x="0" y="0"/>
+          <a:ext cx="0" cy="0"/>
+          <a:chOff x="0" y="0"/>
+          <a:chExt cx="0" cy="0"/>
+        </a:xfrm>
+      </p:grpSpPr>
+      <p:sp>
+        <p:nvSpPr>
+          <p:cNvPr id="2" name="Title 1"/>
+          <p:cNvSpPr>
+            <a:spLocks noGrp="1"/>
+          </p:cNvSpPr>
+          <p:nvPr>
+            <p:ph type="title"/>
+          </p:nvPr>
+        </p:nvSpPr>
+        <p:spPr>
+          <a:xfrm>
+            <a:off x="5190871" y="275767"/>
+            <a:ext cx="3712081" cy="943433"/>
+          </a:xfrm>
+        </p:spPr>
+        <p:txBody>
+          <a:bodyPr>
+            <a:normAutofit/>
+          </a:bodyPr>
+          <a:lstStyle/>
+          <a:p>
+            <a:r>
+              <a:rPr lang="en-US" sz="5400" b="1" dirty="0" smtClean="0">
+                <a:solidFill>
+                  <a:srgbClr val="00B0F0"/>
+                </a:solidFill>
+                <a:latin typeface="Times New Roman" panose="02020603050405020304" pitchFamily="18" charset="0"/>
+                <a:cs typeface="Times New Roman" panose="02020603050405020304" pitchFamily="18" charset="0"/>
+              </a:rPr>
+              <a:t>References</a:t>
+            </a:r>
+            <a:endParaRPr lang="en-IN" sz="5400" b="1" dirty="0">
+              <a:solidFill>
+                <a:srgbClr val="00B0F0"/>
+              </a:solidFill>
+              <a:latin typeface="Times New Roman" panose="02020603050405020304" pitchFamily="18" charset="0"/>
+              <a:cs typeface="Times New Roman" panose="02020603050405020304" pitchFamily="18" charset="0"/>
+            </a:endParaRPr>
+          </a:p>
+        </p:txBody>
+      </p:sp>
+      <p:sp>
+        <p:nvSpPr>
+          <p:cNvPr id="3" name="Content Placeholder 2"/>
+          <p:cNvSpPr>
+            <a:spLocks noGrp="1"/>
+          </p:cNvSpPr>
+          <p:nvPr>
+            <p:ph idx="1"/>
+          </p:nvPr>
+        </p:nvSpPr>
+        <p:spPr>
+          <a:xfrm>
+            <a:off x="1459659" y="1461246"/>
+            <a:ext cx="10149635" cy="4697506"/>
+          </a:xfrm>
+        </p:spPr>
+        <p:txBody>
+          <a:bodyPr>
+            <a:noAutofit/>
+          </a:bodyPr>
+          <a:lstStyle/>
+          <a:p>
+            <a:pPr algn="just"/>
+            <a:r>
+              <a:rPr lang="en-US" altLang="en-US" sz="2400" dirty="0" smtClean="0">
+                <a:solidFill>
+                  <a:schemeClr val="tx1"/>
+                </a:solidFill>
+                <a:latin typeface="Times New Roman" panose="02020603050405020304" pitchFamily="18" charset="0"/>
+                <a:cs typeface="Times New Roman" panose="02020603050405020304" pitchFamily="18" charset="0"/>
+              </a:rPr>
+              <a:t>Sun</a:t>
+            </a:r>
+            <a:r>
+              <a:rPr lang="en-US" altLang="en-US" sz="2400" dirty="0">
+                <a:solidFill>
+                  <a:schemeClr val="tx1"/>
+                </a:solidFill>
+                <a:latin typeface="Times New Roman" panose="02020603050405020304" pitchFamily="18" charset="0"/>
+                <a:cs typeface="Times New Roman" panose="02020603050405020304" pitchFamily="18" charset="0"/>
+              </a:rPr>
+              <a:t>, Y., et al., “Alternative Data in Finance and Business: Emerging Applications and Theory Analysis.” </a:t>
+            </a:r>
+            <a:r>
+              <a:rPr lang="en-US" altLang="en-US" sz="2400" dirty="0" smtClean="0">
+                <a:solidFill>
+                  <a:schemeClr val="tx1"/>
+                </a:solidFill>
+                <a:latin typeface="Times New Roman" panose="02020603050405020304" pitchFamily="18" charset="0"/>
+                <a:cs typeface="Times New Roman" panose="02020603050405020304" pitchFamily="18" charset="0"/>
+              </a:rPr>
+              <a:t>2024.</a:t>
+            </a:r>
+          </a:p>
+          <a:p>
+            <a:pPr algn="just"/>
+            <a:r>
+              <a:rPr lang="en-US" altLang="en-US" sz="2400" dirty="0" err="1" smtClean="0">
+                <a:solidFill>
+                  <a:schemeClr val="tx1"/>
+                </a:solidFill>
+                <a:latin typeface="Times New Roman" panose="02020603050405020304" pitchFamily="18" charset="0"/>
+                <a:cs typeface="Times New Roman" panose="02020603050405020304" pitchFamily="18" charset="0"/>
+              </a:rPr>
+              <a:t>Miljkovic</a:t>
+            </a:r>
+            <a:r>
+              <a:rPr lang="en-US" altLang="en-US" sz="2400" dirty="0">
+                <a:solidFill>
+                  <a:schemeClr val="tx1"/>
+                </a:solidFill>
+                <a:latin typeface="Times New Roman" panose="02020603050405020304" pitchFamily="18" charset="0"/>
+                <a:cs typeface="Times New Roman" panose="02020603050405020304" pitchFamily="18" charset="0"/>
+              </a:rPr>
+              <a:t>, T., &amp; Wang, P., “A Dimension Reduction Assisted Credit Scoring Method for Big Data with Categorical Features.” </a:t>
+            </a:r>
+            <a:r>
+              <a:rPr lang="en-US" altLang="en-US" sz="2400" dirty="0" smtClean="0">
+                <a:solidFill>
+                  <a:schemeClr val="tx1"/>
+                </a:solidFill>
+                <a:latin typeface="Times New Roman" panose="02020603050405020304" pitchFamily="18" charset="0"/>
+                <a:cs typeface="Times New Roman" panose="02020603050405020304" pitchFamily="18" charset="0"/>
+              </a:rPr>
+              <a:t>2025.</a:t>
+            </a:r>
+          </a:p>
+          <a:p>
+            <a:pPr algn="just"/>
+            <a:r>
+              <a:rPr lang="en-US" altLang="en-US" sz="2400" dirty="0" smtClean="0">
+                <a:solidFill>
+                  <a:schemeClr val="tx1"/>
+                </a:solidFill>
+                <a:latin typeface="Times New Roman" panose="02020603050405020304" pitchFamily="18" charset="0"/>
+                <a:cs typeface="Times New Roman" panose="02020603050405020304" pitchFamily="18" charset="0"/>
+              </a:rPr>
+              <a:t>La </a:t>
+            </a:r>
+            <a:r>
+              <a:rPr lang="en-US" altLang="en-US" sz="2400" dirty="0" err="1">
+                <a:solidFill>
+                  <a:schemeClr val="tx1"/>
+                </a:solidFill>
+                <a:latin typeface="Times New Roman" panose="02020603050405020304" pitchFamily="18" charset="0"/>
+                <a:cs typeface="Times New Roman" panose="02020603050405020304" pitchFamily="18" charset="0"/>
+              </a:rPr>
+              <a:t>Gatta</a:t>
+            </a:r>
+            <a:r>
+              <a:rPr lang="en-US" altLang="en-US" sz="2400" dirty="0">
+                <a:solidFill>
+                  <a:schemeClr val="tx1"/>
+                </a:solidFill>
+                <a:latin typeface="Times New Roman" panose="02020603050405020304" pitchFamily="18" charset="0"/>
+                <a:cs typeface="Times New Roman" panose="02020603050405020304" pitchFamily="18" charset="0"/>
+              </a:rPr>
+              <a:t>, V., et al., “A Novel Augmentation Strategy for Credit Scoring Modeling.” </a:t>
+            </a:r>
+            <a:r>
+              <a:rPr lang="en-US" altLang="en-US" sz="2400" dirty="0" smtClean="0">
+                <a:solidFill>
+                  <a:schemeClr val="tx1"/>
+                </a:solidFill>
+                <a:latin typeface="Times New Roman" panose="02020603050405020304" pitchFamily="18" charset="0"/>
+                <a:cs typeface="Times New Roman" panose="02020603050405020304" pitchFamily="18" charset="0"/>
+              </a:rPr>
+              <a:t>2025.</a:t>
+            </a:r>
+          </a:p>
+          <a:p>
+            <a:pPr algn="just"/>
+            <a:r>
+              <a:rPr lang="en-US" altLang="en-US" sz="2400" dirty="0" err="1" smtClean="0">
+                <a:solidFill>
+                  <a:schemeClr val="tx1"/>
+                </a:solidFill>
+                <a:latin typeface="Times New Roman" panose="02020603050405020304" pitchFamily="18" charset="0"/>
+                <a:cs typeface="Times New Roman" panose="02020603050405020304" pitchFamily="18" charset="0"/>
+              </a:rPr>
+              <a:t>Vakrani</a:t>
+            </a:r>
+            <a:r>
+              <a:rPr lang="en-US" altLang="en-US" sz="2400" dirty="0">
+                <a:solidFill>
+                  <a:schemeClr val="tx1"/>
+                </a:solidFill>
+                <a:latin typeface="Times New Roman" panose="02020603050405020304" pitchFamily="18" charset="0"/>
+                <a:cs typeface="Times New Roman" panose="02020603050405020304" pitchFamily="18" charset="0"/>
+              </a:rPr>
+              <a:t>, D. S., et al., “Evaluating AI-Driven Credit Scoring Models versus Traditional Statistical Techniques.” </a:t>
+            </a:r>
+            <a:r>
+              <a:rPr lang="en-US" altLang="en-US" sz="2400" dirty="0" smtClean="0">
+                <a:solidFill>
+                  <a:schemeClr val="tx1"/>
+                </a:solidFill>
+                <a:latin typeface="Times New Roman" panose="02020603050405020304" pitchFamily="18" charset="0"/>
+                <a:cs typeface="Times New Roman" panose="02020603050405020304" pitchFamily="18" charset="0"/>
+              </a:rPr>
+              <a:t>2026.</a:t>
+            </a:r>
+          </a:p>
+          <a:p>
+            <a:pPr algn="just"/>
+            <a:r>
+              <a:rPr lang="en-US" altLang="en-US" sz="2400" dirty="0" err="1" smtClean="0">
+                <a:solidFill>
+                  <a:schemeClr val="tx1"/>
+                </a:solidFill>
+                <a:latin typeface="Times New Roman" panose="02020603050405020304" pitchFamily="18" charset="0"/>
+                <a:cs typeface="Times New Roman" panose="02020603050405020304" pitchFamily="18" charset="0"/>
+              </a:rPr>
+              <a:t>Ayari</a:t>
+            </a:r>
+            <a:r>
+              <a:rPr lang="en-US" altLang="en-US" sz="2400" dirty="0">
+                <a:solidFill>
+                  <a:schemeClr val="tx1"/>
+                </a:solidFill>
+                <a:latin typeface="Times New Roman" panose="02020603050405020304" pitchFamily="18" charset="0"/>
+                <a:cs typeface="Times New Roman" panose="02020603050405020304" pitchFamily="18" charset="0"/>
+              </a:rPr>
+              <a:t>, H., et al., “Machine Learning Powered Financial Credit Scoring: A Systematic Literature Review.” 2026</a:t>
+            </a:r>
+            <a:r>
+              <a:rPr lang="en-US" altLang="en-US" sz="2400" dirty="0" smtClean="0">
+                <a:solidFill>
+                  <a:schemeClr val="tx1"/>
+                </a:solidFill>
+                <a:latin typeface="Times New Roman" panose="02020603050405020304" pitchFamily="18" charset="0"/>
+                <a:cs typeface="Times New Roman" panose="02020603050405020304" pitchFamily="18" charset="0"/>
+              </a:rPr>
+              <a:t>.</a:t>
+            </a:r>
+            <a:endParaRPr lang="en-US" altLang="en-US" sz="2400" dirty="0">
+              <a:solidFill>
+                <a:schemeClr val="tx1"/>
+              </a:solidFill>
+              <a:latin typeface="Times New Roman" panose="02020603050405020304" pitchFamily="18" charset="0"/>
+              <a:cs typeface="Times New Roman" panose="02020603050405020304" pitchFamily="18" charset="0"/>
+            </a:endParaRPr>
+          </a:p>
+        </p:txBody>
+      </p:sp>
+      <p:pic>
+        <p:nvPicPr>
+          <p:cNvPr id="4" name="Picture 3"/>
+          <p:cNvPicPr>
+            <a:picLocks noChangeAspect="1"/>
+          </p:cNvPicPr>
+          <p:nvPr/>
+        </p:nvPicPr>
+        <p:blipFill>
+          <a:blip r:embed="rId2"/>
+          <a:stretch>
+            <a:fillRect/>
+          </a:stretch>
+        </p:blipFill>
+        <p:spPr>
+          <a:xfrm>
+            <a:off x="9518469" y="-62222"/>
+            <a:ext cx="2673531" cy="1782354"/>
+          </a:xfrm>
+          <a:prstGeom prst="rect">
+            <a:avLst/>
+          </a:prstGeom>
+        </p:spPr>
+      </p:pic>
+      <p:pic>
+        <p:nvPicPr>
+          <p:cNvPr id="5" name="Picture 4"/>
+          <p:cNvPicPr>
+            <a:picLocks noChangeAspect="1"/>
+          </p:cNvPicPr>
+          <p:nvPr/>
+        </p:nvPicPr>
+        <p:blipFill>
+          <a:blip r:embed="rId3"/>
+          <a:stretch>
+            <a:fillRect/>
+          </a:stretch>
+        </p:blipFill>
+        <p:spPr>
+          <a:xfrm>
+            <a:off x="533859" y="74036"/>
+            <a:ext cx="2044320" cy="1362880"/>
+          </a:xfrm>
+          <a:prstGeom prst="rect">
+            <a:avLst/>
+          </a:prstGeom>
+        </p:spPr>
+      </p:pic>
+    </p:spTree>
+    <p:extLst>
+      <p:ext uri="{BB962C8B-B14F-4D97-AF65-F5344CB8AC3E}">
+        <p14:creationId xmlns:p14="http://schemas.microsoft.com/office/powerpoint/2010/main" val="2288417470"/>
+      </p:ext>
+    </p:extLst>
+  </p:cSld>
+  <p:clrMapOvr>
+    <a:masterClrMapping/>
+  </p:clrMapOvr>
+  <p:timing>
+    <p:tnLst>
+      <p:par>
+        <p:cTn id="1" dur="indefinite" restart="never" nodeType="tmRoot"/>
+      </p:par>
+    </p:tnLst>
+  </p:timing>
 </p:sld>
 </file>
 
